--- a/Modul Minna 1/Bab 8/33. Minna 1 Tata Bahasa Bab 8 - Slide.pptx
+++ b/Modul Minna 1/Bab 8/33. Minna 1 Tata Bahasa Bab 8 - Slide.pptx
@@ -4459,7 +4459,7 @@
                 <a:ea typeface="Arial" pitchFamily="34" charset="-122"/>
                 <a:cs typeface="Arial" pitchFamily="34" charset="-120"/>
               </a:rPr>
-              <a:t>ふじさんはたかいです。</a:t>
+              <a:t>ブロモさんはたかいです。</a:t>
             </a:r>
             <a:endParaRPr lang="en-US" sz="1700" dirty="0"/>
           </a:p>
@@ -4498,7 +4498,7 @@
                 <a:ea typeface="Arial" pitchFamily="34" charset="-122"/>
                 <a:cs typeface="Arial" pitchFamily="34" charset="-120"/>
               </a:rPr>
-              <a:t>Fujisan wa takai desu</a:t>
+              <a:t>Buromo-san wa takai desu</a:t>
             </a:r>
             <a:pPr indent="0" marL="0">
               <a:buNone/>
@@ -4526,7 +4526,7 @@
                 <a:ea typeface="Arial" pitchFamily="34" charset="-122"/>
                 <a:cs typeface="Arial" pitchFamily="34" charset="-120"/>
               </a:rPr>
-              <a:t>Gunung Fuji tinggi.</a:t>
+              <a:t>Gunung Bromo tinggi.</a:t>
             </a:r>
             <a:endParaRPr lang="en-US" sz="950" dirty="0"/>
           </a:p>
@@ -6709,7 +6709,7 @@
                 <a:ea typeface="Arial" pitchFamily="34" charset="-122"/>
                 <a:cs typeface="Arial" pitchFamily="34" charset="-120"/>
               </a:rPr>
-              <a:t>ペキンはとてもさむいです。</a:t>
+              <a:t>ディエンはとてもさむいです。</a:t>
             </a:r>
             <a:endParaRPr lang="en-US" sz="1700" dirty="0"/>
           </a:p>
@@ -6748,7 +6748,7 @@
                 <a:ea typeface="Arial" pitchFamily="34" charset="-122"/>
                 <a:cs typeface="Arial" pitchFamily="34" charset="-120"/>
               </a:rPr>
-              <a:t>Pekin wa totemo samui desu</a:t>
+              <a:t>Dien wa totemo samui desu</a:t>
             </a:r>
             <a:pPr indent="0" marL="0">
               <a:buNone/>
@@ -6776,7 +6776,7 @@
                 <a:ea typeface="Arial" pitchFamily="34" charset="-122"/>
                 <a:cs typeface="Arial" pitchFamily="34" charset="-120"/>
               </a:rPr>
-              <a:t>Beijing sangat dingin.</a:t>
+              <a:t>Dieng sangat dingin.</a:t>
             </a:r>
             <a:endParaRPr lang="en-US" sz="950" dirty="0"/>
           </a:p>
@@ -7841,7 +7841,7 @@
                 <a:ea typeface="Arial" pitchFamily="34" charset="-122"/>
                 <a:cs typeface="Arial" pitchFamily="34" charset="-120"/>
               </a:rPr>
-              <a:t>ならはどんなまちですか。</a:t>
+              <a:t>ジョグジャカルタはどんなまちですか。</a:t>
             </a:r>
             <a:endParaRPr lang="en-US" sz="1700" dirty="0"/>
           </a:p>
@@ -7880,7 +7880,7 @@
                 <a:ea typeface="Arial" pitchFamily="34" charset="-122"/>
                 <a:cs typeface="Arial" pitchFamily="34" charset="-120"/>
               </a:rPr>
-              <a:t>Nara wa donna machi desu ka</a:t>
+              <a:t>Jogjakarta wa donna machi desu ka</a:t>
             </a:r>
             <a:pPr indent="0" marL="0">
               <a:buNone/>
@@ -7908,7 +7908,7 @@
                 <a:ea typeface="Arial" pitchFamily="34" charset="-122"/>
                 <a:cs typeface="Arial" pitchFamily="34" charset="-120"/>
               </a:rPr>
-              <a:t>Nara kota yang seperti apa?</a:t>
+              <a:t>Yogyakarta kota yang seperti apa?</a:t>
             </a:r>
             <a:endParaRPr lang="en-US" sz="950" dirty="0"/>
           </a:p>
